--- a/public/fun/pack/pptx/talkpro/발표템플릿프리미엄_29_모임·동호회소개_코냑크림.pptx
+++ b/public/fun/pack/pptx/talkpro/발표템플릿프리미엄_29_모임·동호회소개_코냑크림.pptx
@@ -115,12 +115,12 @@
   <p:extLst>
     <p:ext uri="{521415D9-36F7-43E2-AB2F-B90AF26B5E84}">
       <p14:sectionLst xmlns:p14="http://schemas.microsoft.com/office/powerpoint/2010/main">
-        <p14:section name="시작" id="{9B24D6E4-1F34-4FAD-BDBD-61695C0137E9}">
+        <p14:section name="시작" id="{E6DDB3B2-6017-4B2E-8F08-B2FA654D45B9}">
           <p14:sldIdLst>
             <p14:sldId id="256"/>
           </p14:sldIdLst>
         </p14:section>
-        <p14:section name="본문" id="{0F35659E-DE3E-4DBB-B931-8A294729E44B}">
+        <p14:section name="본문" id="{15FC949B-F185-42FE-9EF9-AF0037EF3BBC}">
           <p14:sldIdLst>
             <p14:sldId id="257"/>
             <p14:sldId id="258"/>
@@ -131,7 +131,7 @@
             <p14:sldId id="263"/>
           </p14:sldIdLst>
         </p14:section>
-        <p14:section name="마무리" id="{150CD5BB-6D51-4D1E-93BF-3FD3FE876F2A}">
+        <p14:section name="마무리" id="{ACEC2E04-53FA-4ACD-A87A-784902E86A46}">
           <p14:sldIdLst>
             <p14:sldId id="264"/>
           </p14:sldIdLst>
@@ -2316,7 +2316,7 @@
             </a:lvl1pPr>
           </a:lstStyle>
           <a:p>
-            <a:fld id="{734C15C0-17E6-4BCE-AFAC-2960DA5D6E64}" type="slidenum">
+            <a:fld id="{3AC02559-3358-4E9A-B632-820C48690149}" type="slidenum">
               <a:rPr lang="en-US"/>
               <a:t>‹#›</a:t>
             </a:fld>
@@ -3428,7 +3428,7 @@
             </a:lvl1pPr>
           </a:lstStyle>
           <a:p>
-            <a:fld id="{C1B31C3E-7F16-4A9F-84AC-35BE63B264DB}" type="slidenum">
+            <a:fld id="{DD51B924-92F0-4C23-9FE8-A69250210EE0}" type="slidenum">
               <a:rPr lang="en-US"/>
               <a:t>‹#›</a:t>
             </a:fld>
@@ -4112,7 +4112,7 @@
             </a:lvl1pPr>
           </a:lstStyle>
           <a:p>
-            <a:fld id="{BCDC2DB2-4D81-492E-8E42-D8773681362A}" type="slidenum">
+            <a:fld id="{9A5A3A88-6B8B-4758-9C29-234C83CA3AEE}" type="slidenum">
               <a:rPr lang="en-US"/>
               <a:t>‹#›</a:t>
             </a:fld>
@@ -4935,7 +4935,7 @@
           <a:p>
             <a:r>
               <a:rPr lang="ko-KR"/>
-              <a:t>가을 행사 준비 상황을 공유합니다</a:t>
+              <a:t>행사 준비 상황을 공유합니다</a:t>
             </a:r>
           </a:p>
         </p:txBody>
@@ -4963,7 +4963,7 @@
           <a:p>
             <a:r>
               <a:rPr lang="ko-KR"/>
-              <a:t>0000. 00. 00</a:t>
+              <a:t>날짜 입력</a:t>
             </a:r>
           </a:p>
         </p:txBody>
@@ -5048,7 +5048,7 @@
           <a:bodyPr/>
           <a:lstStyle/>
           <a:p>
-            <a:fld id="{A759ED49-BD00-4B49-8890-DDB2DE0E95AE}" type="slidenum">
+            <a:fld id="{722FC902-85EF-400B-825F-51B07949FBF8}" type="slidenum">
               <a:rPr lang="en-US"/>
               <a:t>‹#›</a:t>
             </a:fld>
@@ -6322,7 +6322,7 @@
           <a:bodyPr/>
           <a:lstStyle/>
           <a:p>
-            <a:fld id="{690DCFAD-5963-461C-B098-90FA7EA5E063}" type="slidenum">
+            <a:fld id="{EB847696-91D7-4F24-914D-7D6A5AABF5A5}" type="slidenum">
               <a:rPr lang="en-US"/>
               <a:t>‹#›</a:t>
             </a:fld>
@@ -6410,7 +6410,7 @@
           <a:bodyPr/>
           <a:lstStyle/>
           <a:p>
-            <a:fld id="{E0F9365C-F7BE-4C5B-836B-2306861BCF15}" type="slidenum">
+            <a:fld id="{C3BE954C-051F-489A-A44A-7F83349B55E0}" type="slidenum">
               <a:rPr lang="en-US"/>
               <a:t>‹#›</a:t>
             </a:fld>
@@ -7437,7 +7437,7 @@
           <a:bodyPr/>
           <a:lstStyle/>
           <a:p>
-            <a:fld id="{829A736E-BBE0-4B50-B5A4-A02F6D099B6C}" type="slidenum">
+            <a:fld id="{972FF8AD-5EE0-4220-A46F-576FD04FDBD1}" type="slidenum">
               <a:rPr lang="en-US"/>
               <a:t>‹#›</a:t>
             </a:fld>
@@ -8089,7 +8089,7 @@
           <a:bodyPr/>
           <a:lstStyle/>
           <a:p>
-            <a:fld id="{29D4477D-1610-4BCE-98D6-3A24AF7890D8}" type="slidenum">
+            <a:fld id="{D2CBEBB6-833B-48D3-943E-D2DA72DE64AC}" type="slidenum">
               <a:rPr lang="en-US"/>
               <a:t>‹#›</a:t>
             </a:fld>
@@ -8272,7 +8272,7 @@
           <a:bodyPr/>
           <a:lstStyle/>
           <a:p>
-            <a:fld id="{7CAF0BC3-7875-489F-AA43-07C4956D0D86}" type="slidenum">
+            <a:fld id="{C776816E-7DF7-47C6-8286-8DEEB15D4CEB}" type="slidenum">
               <a:rPr lang="en-US"/>
               <a:t>‹#›</a:t>
             </a:fld>
@@ -9336,7 +9336,7 @@
           <a:bodyPr/>
           <a:lstStyle/>
           <a:p>
-            <a:fld id="{8906A48B-A767-486D-86A3-21BBFEDE7A32}" type="slidenum">
+            <a:fld id="{D5A03E18-F06D-4977-BE13-D2B8B0EF70C8}" type="slidenum">
               <a:rPr lang="en-US"/>
               <a:t>‹#›</a:t>
             </a:fld>
